--- a/assets/materials/L2/L2-slides.pptx
+++ b/assets/materials/L2/L2-slides.pptx
@@ -8046,7 +8046,7 @@
       </p:sp>
       <p:pic>
         <p:nvPicPr>
-          <p:cNvPr id="3" name="Image 0" descr="/var/folders/9c/bpqwjkxs5lx9pmncd7cyl1kh0000gn/T/tmp.fFtyL6eOZW/time-and-a-half-slide.png">    </p:cNvPr>
+          <p:cNvPr id="3" name="Image 0" descr="/var/folders/9c/bpqwjkxs5lx9pmncd7cyl1kh0000gn/T/tmp.5w86FzDoHE/time-and-a-half-slide.png">    </p:cNvPr>
           <p:cNvPicPr>
             <a:picLocks noChangeAspect="1"/>
           </p:cNvPicPr>
